--- a/STARLAB_Slide_Decks_All/04_Experimental_Engineering_Design_Basics_2.0.pptx
+++ b/STARLAB_Slide_Decks_All/04_Experimental_Engineering_Design_Basics_2.0.pptx
@@ -2,38 +2,38 @@
 <file path=ppt/presentation.xml><?xml version="1.0" encoding="utf-8"?>
 <p:presentation xmlns:p="http://schemas.openxmlformats.org/presentationml/2006/main" embedTrueTypeFonts="1" saveSubsetFonts="0">
   <p:sldMasterIdLst>
-    <p:sldMasterId xmlns:r="http://schemas.openxmlformats.org/officeDocument/2006/relationships" id="2147483648" r:id="Re5bb5949d7a24791"/>
+    <p:sldMasterId xmlns:r="http://schemas.openxmlformats.org/officeDocument/2006/relationships" id="2147483648" r:id="Rbfbaf8d51d83429d"/>
   </p:sldMasterIdLst>
   <p:notesMasterIdLst>
-    <p:notesMasterId xmlns:r="http://schemas.openxmlformats.org/officeDocument/2006/relationships" r:id="R7eaa7ce5fdb74f95"/>
+    <p:notesMasterId xmlns:r="http://schemas.openxmlformats.org/officeDocument/2006/relationships" r:id="Ra5a2dc3405f44c4e"/>
   </p:notesMasterIdLst>
   <p:sldIdLst>
-    <p:sldId xmlns:r="http://schemas.openxmlformats.org/officeDocument/2006/relationships" id="256" r:id="Raf074e4865db49e3"/>
-    <p:sldId xmlns:r="http://schemas.openxmlformats.org/officeDocument/2006/relationships" id="257" r:id="R8d567fa0be5a4c68"/>
-    <p:sldId xmlns:r="http://schemas.openxmlformats.org/officeDocument/2006/relationships" id="258" r:id="R2e39d831b43b4e22"/>
-    <p:sldId xmlns:r="http://schemas.openxmlformats.org/officeDocument/2006/relationships" id="259" r:id="Rdb496c4efed7459b"/>
-    <p:sldId xmlns:r="http://schemas.openxmlformats.org/officeDocument/2006/relationships" id="260" r:id="R6268582b9a3b423a"/>
-    <p:sldId xmlns:r="http://schemas.openxmlformats.org/officeDocument/2006/relationships" id="261" r:id="R7b114b701411470d"/>
-    <p:sldId xmlns:r="http://schemas.openxmlformats.org/officeDocument/2006/relationships" id="262" r:id="R8ee234f91dcf43dc"/>
-    <p:sldId xmlns:r="http://schemas.openxmlformats.org/officeDocument/2006/relationships" id="263" r:id="R16586cdb65b84ca5"/>
-    <p:sldId xmlns:r="http://schemas.openxmlformats.org/officeDocument/2006/relationships" id="264" r:id="R4ccda3cd8b4e461f"/>
-    <p:sldId xmlns:r="http://schemas.openxmlformats.org/officeDocument/2006/relationships" id="265" r:id="Ra35520b4a1154720"/>
-    <p:sldId xmlns:r="http://schemas.openxmlformats.org/officeDocument/2006/relationships" id="266" r:id="R2e6ce3ee6f6049e5"/>
-    <p:sldId xmlns:r="http://schemas.openxmlformats.org/officeDocument/2006/relationships" id="267" r:id="Ra433b3325d2d4ab7"/>
-    <p:sldId xmlns:r="http://schemas.openxmlformats.org/officeDocument/2006/relationships" id="268" r:id="R86af1066e3ff40f9"/>
-    <p:sldId xmlns:r="http://schemas.openxmlformats.org/officeDocument/2006/relationships" id="269" r:id="R03a93f1b9cba408c"/>
-    <p:sldId xmlns:r="http://schemas.openxmlformats.org/officeDocument/2006/relationships" id="270" r:id="Rf8dbbafcd0af4162"/>
-    <p:sldId xmlns:r="http://schemas.openxmlformats.org/officeDocument/2006/relationships" id="271" r:id="R4d14d1952d8f4902"/>
-    <p:sldId xmlns:r="http://schemas.openxmlformats.org/officeDocument/2006/relationships" id="272" r:id="Rddc383e695bf43ac"/>
-    <p:sldId xmlns:r="http://schemas.openxmlformats.org/officeDocument/2006/relationships" id="273" r:id="R6722cca3d9a84fce"/>
+    <p:sldId xmlns:r="http://schemas.openxmlformats.org/officeDocument/2006/relationships" id="256" r:id="Re2ed7634b5df4d3f"/>
+    <p:sldId xmlns:r="http://schemas.openxmlformats.org/officeDocument/2006/relationships" id="257" r:id="Rde079784613d4ad1"/>
+    <p:sldId xmlns:r="http://schemas.openxmlformats.org/officeDocument/2006/relationships" id="258" r:id="R2cf5e3c99f354a05"/>
+    <p:sldId xmlns:r="http://schemas.openxmlformats.org/officeDocument/2006/relationships" id="259" r:id="Rc5507b832c174d5b"/>
+    <p:sldId xmlns:r="http://schemas.openxmlformats.org/officeDocument/2006/relationships" id="260" r:id="R50640627a545497d"/>
+    <p:sldId xmlns:r="http://schemas.openxmlformats.org/officeDocument/2006/relationships" id="261" r:id="R8711dcc6d6ab4432"/>
+    <p:sldId xmlns:r="http://schemas.openxmlformats.org/officeDocument/2006/relationships" id="262" r:id="R3faf7c1692d84c45"/>
+    <p:sldId xmlns:r="http://schemas.openxmlformats.org/officeDocument/2006/relationships" id="263" r:id="R7df524f10ff74892"/>
+    <p:sldId xmlns:r="http://schemas.openxmlformats.org/officeDocument/2006/relationships" id="264" r:id="Rcaacb1e35ebd45fe"/>
+    <p:sldId xmlns:r="http://schemas.openxmlformats.org/officeDocument/2006/relationships" id="265" r:id="Rec68f59f2ad24300"/>
+    <p:sldId xmlns:r="http://schemas.openxmlformats.org/officeDocument/2006/relationships" id="266" r:id="R161d10ac342f47af"/>
+    <p:sldId xmlns:r="http://schemas.openxmlformats.org/officeDocument/2006/relationships" id="267" r:id="R4e6d0b6d498d4ff6"/>
+    <p:sldId xmlns:r="http://schemas.openxmlformats.org/officeDocument/2006/relationships" id="268" r:id="Rfd7e8009ca844f98"/>
+    <p:sldId xmlns:r="http://schemas.openxmlformats.org/officeDocument/2006/relationships" id="269" r:id="R7c215ad294d846b2"/>
+    <p:sldId xmlns:r="http://schemas.openxmlformats.org/officeDocument/2006/relationships" id="270" r:id="R206b04f471704d31"/>
+    <p:sldId xmlns:r="http://schemas.openxmlformats.org/officeDocument/2006/relationships" id="271" r:id="R9dac6989ead644c2"/>
+    <p:sldId xmlns:r="http://schemas.openxmlformats.org/officeDocument/2006/relationships" id="272" r:id="R7854adb5fc134399"/>
+    <p:sldId xmlns:r="http://schemas.openxmlformats.org/officeDocument/2006/relationships" id="273" r:id="Rd66ba03f8dee44dd"/>
   </p:sldIdLst>
   <p:sldSz cx="12191675" cy="6858000"/>
   <p:notesSz cx="6858000" cy="9144000"/>
   <p:embeddedFontLst>
     <p:embeddedFont>
       <p:font typeface="Play"/>
-      <p:regular xmlns:r="http://schemas.openxmlformats.org/officeDocument/2006/relationships" r:id="R492fb23c28ea46c1"/>
-      <p:bold xmlns:r="http://schemas.openxmlformats.org/officeDocument/2006/relationships" r:id="Rc4085fb099cb40ea"/>
+      <p:regular xmlns:r="http://schemas.openxmlformats.org/officeDocument/2006/relationships" r:id="R278dae7bc39b44b4"/>
+      <p:bold xmlns:r="http://schemas.openxmlformats.org/officeDocument/2006/relationships" r:id="Re09c7f93d1ec4d2a"/>
     </p:embeddedFont>
   </p:embeddedFontLst>
   <p:defaultTextStyle>
@@ -635,7 +635,7 @@
               <a:buNone/>
             </a:pPr>
             <a:r>
-              <a:t>REVISIT / SECONDARY USE</a:t>
+              <a:t>REVISIT / REFERENCE</a:t>
             </a:r>
           </a:p>
           <a:p xmlns:a="http://schemas.openxmlformats.org/drawingml/2006/main">
@@ -691,7 +691,7 @@
               <a:buNone/>
             </a:pPr>
             <a:r>
-              <a:t>Shared weekly packet with Deck 2:</a:t>
+              <a:t>- Unit 1 Student Handouts 5-8</a:t>
             </a:r>
           </a:p>
           <a:p xmlns:a="http://schemas.openxmlformats.org/drawingml/2006/main">
@@ -705,7 +705,7 @@
               <a:buNone/>
             </a:pPr>
             <a:r>
-              <a:t>- Unit 1 Student Handouts 5-8</a:t>
+              <a:t>- Unit 1 Appendices D-H</a:t>
             </a:r>
           </a:p>
           <a:p xmlns:a="http://schemas.openxmlformats.org/drawingml/2006/main">
@@ -719,7 +719,7 @@
               <a:buNone/>
             </a:pPr>
             <a:r>
-              <a:t>- Unit 1 Appendices D-H</a:t>
+              <a:t/>
             </a:r>
           </a:p>
           <a:p xmlns:a="http://schemas.openxmlformats.org/drawingml/2006/main">
@@ -733,6 +733,48 @@
               <a:buNone/>
             </a:pPr>
             <a:r>
+              <a:t>REQUIRED WEEK 3 MATERIALS</a:t>
+            </a:r>
+          </a:p>
+          <a:p xmlns:a="http://schemas.openxmlformats.org/drawingml/2006/main">
+            <a:pPr marL="0" indent="0" algn="l">
+              <a:spcBef>
+                <a:spcPts val="0"/>
+              </a:spcBef>
+              <a:spcAft>
+                <a:spcPts val="0"/>
+              </a:spcAft>
+              <a:buNone/>
+            </a:pPr>
+            <a:r>
+              <a:t>- Unit 2 Student Handouts 1-5</a:t>
+            </a:r>
+          </a:p>
+          <a:p xmlns:a="http://schemas.openxmlformats.org/drawingml/2006/main">
+            <a:pPr marL="0" indent="0" algn="l">
+              <a:spcBef>
+                <a:spcPts val="0"/>
+              </a:spcBef>
+              <a:spcAft>
+                <a:spcPts val="0"/>
+              </a:spcAft>
+              <a:buNone/>
+            </a:pPr>
+            <a:r>
+              <a:t>- Unit 2 Appendices A-D</a:t>
+            </a:r>
+          </a:p>
+          <a:p xmlns:a="http://schemas.openxmlformats.org/drawingml/2006/main">
+            <a:pPr marL="0" indent="0" algn="l">
+              <a:spcBef>
+                <a:spcPts val="0"/>
+              </a:spcBef>
+              <a:spcAft>
+                <a:spcPts val="0"/>
+              </a:spcAft>
+              <a:buNone/>
+            </a:pPr>
+            <a:r>
               <a:t/>
             </a:r>
           </a:p>
@@ -789,7 +831,7 @@
               <a:buNone/>
             </a:pPr>
             <a:r>
-              <a:t>REQUIRED WEEK 3 MATERIALS</a:t>
+              <a:t>RESOURCE ALIGNMENT</a:t>
             </a:r>
           </a:p>
           <a:p xmlns:a="http://schemas.openxmlformats.org/drawingml/2006/main">
@@ -803,77 +845,7 @@
               <a:buNone/>
             </a:pPr>
             <a:r>
-              <a:t>Shared weekly packet with Deck 5:</a:t>
-            </a:r>
-          </a:p>
-          <a:p xmlns:a="http://schemas.openxmlformats.org/drawingml/2006/main">
-            <a:pPr marL="0" indent="0" algn="l">
-              <a:spcBef>
-                <a:spcPts val="0"/>
-              </a:spcBef>
-              <a:spcAft>
-                <a:spcPts val="0"/>
-              </a:spcAft>
-              <a:buNone/>
-            </a:pPr>
-            <a:r>
-              <a:t>- Unit 2 Student Handouts 1-5</a:t>
-            </a:r>
-          </a:p>
-          <a:p xmlns:a="http://schemas.openxmlformats.org/drawingml/2006/main">
-            <a:pPr marL="0" indent="0" algn="l">
-              <a:spcBef>
-                <a:spcPts val="0"/>
-              </a:spcBef>
-              <a:spcAft>
-                <a:spcPts val="0"/>
-              </a:spcAft>
-              <a:buNone/>
-            </a:pPr>
-            <a:r>
-              <a:t>- Unit 2 Appendices A-D</a:t>
-            </a:r>
-          </a:p>
-          <a:p xmlns:a="http://schemas.openxmlformats.org/drawingml/2006/main">
-            <a:pPr marL="0" indent="0" algn="l">
-              <a:spcBef>
-                <a:spcPts val="0"/>
-              </a:spcBef>
-              <a:spcAft>
-                <a:spcPts val="0"/>
-              </a:spcAft>
-              <a:buNone/>
-            </a:pPr>
-            <a:r>
-              <a:t/>
-            </a:r>
-          </a:p>
-          <a:p xmlns:a="http://schemas.openxmlformats.org/drawingml/2006/main">
-            <a:pPr marL="0" indent="0" algn="l">
-              <a:spcBef>
-                <a:spcPts val="0"/>
-              </a:spcBef>
-              <a:spcAft>
-                <a:spcPts val="0"/>
-              </a:spcAft>
-              <a:buNone/>
-            </a:pPr>
-            <a:r>
-              <a:t>RESOURCE ALIGNMENT</a:t>
-            </a:r>
-          </a:p>
-          <a:p xmlns:a="http://schemas.openxmlformats.org/drawingml/2006/main">
-            <a:pPr marL="0" indent="0" algn="l">
-              <a:spcBef>
-                <a:spcPts val="0"/>
-              </a:spcBef>
-              <a:spcAft>
-                <a:spcPts val="0"/>
-              </a:spcAft>
-              <a:buNone/>
-            </a:pPr>
-            <a:r>
-              <a:t>Use this deck first as the Week 2 experimental-design foundation, then revisit its variables, controls, criteria, and constraints language during Week 3 planning.</a:t>
+              <a:t>Teach the experimental-design foundation in Week 2. Revisit variables, controls, criteria, and constraints language during Week 3 planning.</a:t>
             </a:r>
           </a:p>
         </p:txBody>
@@ -2512,7 +2484,7 @@
       </p:grpSpPr>
       <p:cxnSp>
         <p:nvCxnSpPr>
-          <p:cNvPr id="16" name="Google Shape;12;p3"/>
+          <p:cNvPr id="20" name="Google Shape;12;p3"/>
           <p:cNvCxnSpPr/>
           <p:nvPr/>
         </p:nvCxnSpPr>
@@ -2537,7 +2509,7 @@
       </p:cxnSp>
       <p:cxnSp>
         <p:nvCxnSpPr>
-          <p:cNvPr id="17" name="Google Shape;13;p3"/>
+          <p:cNvPr id="21" name="Google Shape;13;p3"/>
           <p:cNvCxnSpPr/>
           <p:nvPr/>
         </p:nvCxnSpPr>
@@ -2562,7 +2534,7 @@
       </p:cxnSp>
       <p:cxnSp>
         <p:nvCxnSpPr>
-          <p:cNvPr id="18" name="Google Shape;14;p3"/>
+          <p:cNvPr id="22" name="Google Shape;14;p3"/>
           <p:cNvCxnSpPr/>
           <p:nvPr/>
         </p:nvCxnSpPr>
@@ -2587,7 +2559,7 @@
       </p:cxnSp>
       <p:cxnSp>
         <p:nvCxnSpPr>
-          <p:cNvPr id="19" name="Google Shape;15;p3"/>
+          <p:cNvPr id="23" name="Google Shape;15;p3"/>
           <p:cNvCxnSpPr/>
           <p:nvPr/>
         </p:nvCxnSpPr>
@@ -2631,8 +2603,8 @@
   </p:cSld>
   <p:clrMap bg1="lt1" tx1="dk1" bg2="dk2" tx2="lt2" accent1="accent1" accent2="accent2" accent3="accent3" accent4="accent4" accent5="accent5" accent6="accent6" hlink="hlink" folHlink="folHlink"/>
   <p:sldLayoutIdLst>
-    <p:sldLayoutId xmlns:r="http://schemas.openxmlformats.org/officeDocument/2006/relationships" id="2147483649" r:id="Raa07d3bef1d843bb"/>
-    <p:sldLayoutId xmlns:r="http://schemas.openxmlformats.org/officeDocument/2006/relationships" id="2147483650" r:id="Rf1db0fc98bc2425f"/>
+    <p:sldLayoutId xmlns:r="http://schemas.openxmlformats.org/officeDocument/2006/relationships" id="2147483649" r:id="R9c86f1fcb9ea4ee6"/>
+    <p:sldLayoutId xmlns:r="http://schemas.openxmlformats.org/officeDocument/2006/relationships" id="2147483650" r:id="R7a3548d481dc4273"/>
   </p:sldLayoutIdLst>
   <p:hf sldNum="0" hdr="0" ftr="0" dt="0"/>
   <p:txStyles>
@@ -3700,7 +3672,7 @@
           <p:nvPr/>
         </p:nvPicPr>
         <p:blipFill rotWithShape="1">
-          <a:blip xmlns:r="http://schemas.openxmlformats.org/officeDocument/2006/relationships" xmlns:a="http://schemas.openxmlformats.org/drawingml/2006/main" r:embed="R19092b28f0904dd3">
+          <a:blip xmlns:r="http://schemas.openxmlformats.org/officeDocument/2006/relationships" xmlns:a="http://schemas.openxmlformats.org/drawingml/2006/main" r:embed="R902143758d384e56">
             <a:alphaModFix/>
           </a:blip>
           <a:srcRect xmlns:a="http://schemas.openxmlformats.org/drawingml/2006/main" l="0" t="0" r="0" b="0"/>
@@ -4186,7 +4158,7 @@
       </p:sp>
       <p:cxnSp>
         <p:nvCxnSpPr>
-          <p:cNvPr id="374" name="Google Shape;334;p13"/>
+          <p:cNvPr id="403" name="Google Shape;334;p13"/>
           <p:cNvCxnSpPr/>
           <p:nvPr/>
         </p:nvCxnSpPr>
@@ -4211,7 +4183,7 @@
       </p:cxnSp>
       <p:cxnSp>
         <p:nvCxnSpPr>
-          <p:cNvPr id="375" name="Google Shape;335;p13"/>
+          <p:cNvPr id="404" name="Google Shape;335;p13"/>
           <p:cNvCxnSpPr/>
           <p:nvPr/>
         </p:nvCxnSpPr>
@@ -4586,7 +4558,7 @@
       </p:sp>
       <p:cxnSp>
         <p:nvCxnSpPr>
-          <p:cNvPr id="382" name="Google Shape;342;p13"/>
+          <p:cNvPr id="411" name="Google Shape;342;p13"/>
           <p:cNvCxnSpPr/>
           <p:nvPr/>
         </p:nvCxnSpPr>
@@ -4784,7 +4756,7 @@
       </p:sp>
       <p:cxnSp>
         <p:nvCxnSpPr>
-          <p:cNvPr id="386" name="Google Shape;346;p13"/>
+          <p:cNvPr id="415" name="Google Shape;346;p13"/>
           <p:cNvCxnSpPr/>
           <p:nvPr/>
         </p:nvCxnSpPr>
@@ -4982,7 +4954,7 @@
       </p:sp>
       <p:cxnSp>
         <p:nvCxnSpPr>
-          <p:cNvPr id="390" name="Google Shape;350;p13"/>
+          <p:cNvPr id="419" name="Google Shape;350;p13"/>
           <p:cNvCxnSpPr/>
           <p:nvPr/>
         </p:nvCxnSpPr>
@@ -5180,7 +5152,7 @@
       </p:sp>
       <p:cxnSp>
         <p:nvCxnSpPr>
-          <p:cNvPr id="394" name="Google Shape;354;p13"/>
+          <p:cNvPr id="423" name="Google Shape;354;p13"/>
           <p:cNvCxnSpPr/>
           <p:nvPr/>
         </p:nvCxnSpPr>
@@ -5378,7 +5350,7 @@
       </p:sp>
       <p:cxnSp>
         <p:nvCxnSpPr>
-          <p:cNvPr id="398" name="Google Shape;358;p13"/>
+          <p:cNvPr id="427" name="Google Shape;358;p13"/>
           <p:cNvCxnSpPr/>
           <p:nvPr/>
         </p:nvCxnSpPr>
@@ -6307,7 +6279,7 @@
       </p:sp>
       <p:cxnSp>
         <p:nvCxnSpPr>
-          <p:cNvPr id="418" name="Google Shape;379;p14"/>
+          <p:cNvPr id="424" name="Google Shape;379;p14"/>
           <p:cNvCxnSpPr/>
           <p:nvPr/>
         </p:nvCxnSpPr>
@@ -6332,7 +6304,7 @@
       </p:cxnSp>
       <p:cxnSp>
         <p:nvCxnSpPr>
-          <p:cNvPr id="419" name="Google Shape;380;p14"/>
+          <p:cNvPr id="425" name="Google Shape;380;p14"/>
           <p:cNvCxnSpPr/>
           <p:nvPr/>
         </p:nvCxnSpPr>
@@ -8553,7 +8525,7 @@
       </p:sp>
       <p:cxnSp>
         <p:nvCxnSpPr>
-          <p:cNvPr id="447" name="Google Shape;423;p15"/>
+          <p:cNvPr id="453" name="Google Shape;423;p15"/>
           <p:cNvCxnSpPr/>
           <p:nvPr/>
         </p:nvCxnSpPr>
@@ -8578,7 +8550,7 @@
       </p:cxnSp>
       <p:cxnSp>
         <p:nvCxnSpPr>
-          <p:cNvPr id="448" name="Google Shape;424;p15"/>
+          <p:cNvPr id="454" name="Google Shape;424;p15"/>
           <p:cNvCxnSpPr/>
           <p:nvPr/>
         </p:nvCxnSpPr>
@@ -10016,7 +9988,7 @@
       </p:sp>
       <p:cxnSp>
         <p:nvCxnSpPr>
-          <p:cNvPr id="486" name="Google Shape;452;p16"/>
+          <p:cNvPr id="492" name="Google Shape;452;p16"/>
           <p:cNvCxnSpPr/>
           <p:nvPr/>
         </p:nvCxnSpPr>
@@ -10041,7 +10013,7 @@
       </p:cxnSp>
       <p:cxnSp>
         <p:nvCxnSpPr>
-          <p:cNvPr id="487" name="Google Shape;453;p16"/>
+          <p:cNvPr id="493" name="Google Shape;453;p16"/>
           <p:cNvCxnSpPr/>
           <p:nvPr/>
         </p:nvCxnSpPr>
@@ -11969,7 +11941,7 @@
       </p:sp>
       <p:cxnSp>
         <p:nvCxnSpPr>
-          <p:cNvPr id="518" name="Google Shape;491;p17"/>
+          <p:cNvPr id="524" name="Google Shape;491;p17"/>
           <p:cNvCxnSpPr/>
           <p:nvPr/>
         </p:nvCxnSpPr>
@@ -11994,7 +11966,7 @@
       </p:cxnSp>
       <p:cxnSp>
         <p:nvCxnSpPr>
-          <p:cNvPr id="519" name="Google Shape;492;p17"/>
+          <p:cNvPr id="525" name="Google Shape;492;p17"/>
           <p:cNvCxnSpPr/>
           <p:nvPr/>
         </p:nvCxnSpPr>
@@ -13515,7 +13487,7 @@
       </p:sp>
       <p:cxnSp>
         <p:nvCxnSpPr>
-          <p:cNvPr id="552" name="Google Shape;523;p18"/>
+          <p:cNvPr id="558" name="Google Shape;523;p18"/>
           <p:cNvCxnSpPr/>
           <p:nvPr/>
         </p:nvCxnSpPr>
@@ -13540,7 +13512,7 @@
       </p:cxnSp>
       <p:cxnSp>
         <p:nvCxnSpPr>
-          <p:cNvPr id="553" name="Google Shape;524;p18"/>
+          <p:cNvPr id="559" name="Google Shape;524;p18"/>
           <p:cNvCxnSpPr/>
           <p:nvPr/>
         </p:nvCxnSpPr>
@@ -15181,7 +15153,7 @@
       </p:sp>
       <p:cxnSp>
         <p:nvCxnSpPr>
-          <p:cNvPr id="593" name="Google Shape;557;p19"/>
+          <p:cNvPr id="599" name="Google Shape;557;p19"/>
           <p:cNvCxnSpPr/>
           <p:nvPr/>
         </p:nvCxnSpPr>
@@ -15206,7 +15178,7 @@
       </p:cxnSp>
       <p:cxnSp>
         <p:nvCxnSpPr>
-          <p:cNvPr id="594" name="Google Shape;558;p19"/>
+          <p:cNvPr id="600" name="Google Shape;558;p19"/>
           <p:cNvCxnSpPr/>
           <p:nvPr/>
         </p:nvCxnSpPr>
@@ -17244,7 +17216,7 @@
       </p:sp>
       <p:cxnSp>
         <p:nvCxnSpPr>
-          <p:cNvPr id="622" name="Google Shape;598;p20"/>
+          <p:cNvPr id="644" name="Google Shape;598;p20"/>
           <p:cNvCxnSpPr/>
           <p:nvPr/>
         </p:nvCxnSpPr>
@@ -17269,7 +17241,7 @@
       </p:cxnSp>
       <p:cxnSp>
         <p:nvCxnSpPr>
-          <p:cNvPr id="623" name="Google Shape;599;p20"/>
+          <p:cNvPr id="645" name="Google Shape;599;p20"/>
           <p:cNvCxnSpPr/>
           <p:nvPr/>
         </p:nvCxnSpPr>
@@ -18167,7 +18139,7 @@
       </p:sp>
       <p:cxnSp>
         <p:nvCxnSpPr>
-          <p:cNvPr id="639" name="Google Shape;615;p20"/>
+          <p:cNvPr id="661" name="Google Shape;615;p20"/>
           <p:cNvCxnSpPr/>
           <p:nvPr/>
         </p:nvCxnSpPr>
@@ -18575,7 +18547,7 @@
       </p:sp>
       <p:cxnSp>
         <p:nvCxnSpPr>
-          <p:cNvPr id="647" name="Google Shape;627;p21"/>
+          <p:cNvPr id="653" name="Google Shape;627;p21"/>
           <p:cNvCxnSpPr/>
           <p:nvPr/>
         </p:nvCxnSpPr>
@@ -18600,7 +18572,7 @@
       </p:cxnSp>
       <p:cxnSp>
         <p:nvCxnSpPr>
-          <p:cNvPr id="648" name="Google Shape;628;p21"/>
+          <p:cNvPr id="654" name="Google Shape;628;p21"/>
           <p:cNvCxnSpPr/>
           <p:nvPr/>
         </p:nvCxnSpPr>
@@ -19710,7 +19682,7 @@
       </p:sp>
       <p:cxnSp>
         <p:nvCxnSpPr>
-          <p:cNvPr id="64" name="Google Shape;36;p5"/>
+          <p:cNvPr id="70" name="Google Shape;36;p5"/>
           <p:cNvCxnSpPr/>
           <p:nvPr/>
         </p:nvCxnSpPr>
@@ -19735,7 +19707,7 @@
       </p:cxnSp>
       <p:cxnSp>
         <p:nvCxnSpPr>
-          <p:cNvPr id="65" name="Google Shape;37;p5"/>
+          <p:cNvPr id="71" name="Google Shape;37;p5"/>
           <p:cNvCxnSpPr/>
           <p:nvPr/>
         </p:nvCxnSpPr>
@@ -21315,7 +21287,7 @@
       </p:sp>
       <p:cxnSp>
         <p:nvCxnSpPr>
-          <p:cNvPr id="118" name="Google Shape;69;p6"/>
+          <p:cNvPr id="124" name="Google Shape;69;p6"/>
           <p:cNvCxnSpPr/>
           <p:nvPr/>
         </p:nvCxnSpPr>
@@ -21340,7 +21312,7 @@
       </p:cxnSp>
       <p:cxnSp>
         <p:nvCxnSpPr>
-          <p:cNvPr id="119" name="Google Shape;70;p6"/>
+          <p:cNvPr id="125" name="Google Shape;70;p6"/>
           <p:cNvCxnSpPr/>
           <p:nvPr/>
         </p:nvCxnSpPr>
@@ -24131,7 +24103,7 @@
       </p:sp>
       <p:cxnSp>
         <p:nvCxnSpPr>
-          <p:cNvPr id="152" name="Google Shape;123;p7"/>
+          <p:cNvPr id="158" name="Google Shape;123;p7"/>
           <p:cNvCxnSpPr/>
           <p:nvPr/>
         </p:nvCxnSpPr>
@@ -24156,7 +24128,7 @@
       </p:cxnSp>
       <p:cxnSp>
         <p:nvCxnSpPr>
-          <p:cNvPr id="153" name="Google Shape;124;p7"/>
+          <p:cNvPr id="159" name="Google Shape;124;p7"/>
           <p:cNvCxnSpPr/>
           <p:nvPr/>
         </p:nvCxnSpPr>
@@ -25797,7 +25769,7 @@
       </p:sp>
       <p:cxnSp>
         <p:nvCxnSpPr>
-          <p:cNvPr id="191" name="Google Shape;157;p8"/>
+          <p:cNvPr id="197" name="Google Shape;157;p8"/>
           <p:cNvCxnSpPr/>
           <p:nvPr/>
         </p:nvCxnSpPr>
@@ -25822,7 +25794,7 @@
       </p:cxnSp>
       <p:cxnSp>
         <p:nvCxnSpPr>
-          <p:cNvPr id="192" name="Google Shape;158;p8"/>
+          <p:cNvPr id="198" name="Google Shape;158;p8"/>
           <p:cNvCxnSpPr/>
           <p:nvPr/>
         </p:nvCxnSpPr>
@@ -27758,7 +27730,7 @@
       </p:sp>
       <p:cxnSp>
         <p:nvCxnSpPr>
-          <p:cNvPr id="225" name="Google Shape;196;p9"/>
+          <p:cNvPr id="231" name="Google Shape;196;p9"/>
           <p:cNvCxnSpPr/>
           <p:nvPr/>
         </p:nvCxnSpPr>
@@ -27783,7 +27755,7 @@
       </p:cxnSp>
       <p:cxnSp>
         <p:nvCxnSpPr>
-          <p:cNvPr id="226" name="Google Shape;197;p9"/>
+          <p:cNvPr id="232" name="Google Shape;197;p9"/>
           <p:cNvCxnSpPr/>
           <p:nvPr/>
         </p:nvCxnSpPr>
@@ -29424,7 +29396,7 @@
       </p:sp>
       <p:cxnSp>
         <p:nvCxnSpPr>
-          <p:cNvPr id="260" name="Google Shape;230;p10"/>
+          <p:cNvPr id="266" name="Google Shape;230;p10"/>
           <p:cNvCxnSpPr/>
           <p:nvPr/>
         </p:nvCxnSpPr>
@@ -29449,7 +29421,7 @@
       </p:cxnSp>
       <p:cxnSp>
         <p:nvCxnSpPr>
-          <p:cNvPr id="261" name="Google Shape;231;p10"/>
+          <p:cNvPr id="267" name="Google Shape;231;p10"/>
           <p:cNvCxnSpPr/>
           <p:nvPr/>
         </p:nvCxnSpPr>
@@ -31145,7 +31117,7 @@
       </p:sp>
       <p:cxnSp>
         <p:nvCxnSpPr>
-          <p:cNvPr id="295" name="Google Shape;265;p11"/>
+          <p:cNvPr id="301" name="Google Shape;265;p11"/>
           <p:cNvCxnSpPr/>
           <p:nvPr/>
         </p:nvCxnSpPr>
@@ -31170,7 +31142,7 @@
       </p:cxnSp>
       <p:cxnSp>
         <p:nvCxnSpPr>
-          <p:cNvPr id="296" name="Google Shape;266;p11"/>
+          <p:cNvPr id="302" name="Google Shape;266;p11"/>
           <p:cNvCxnSpPr/>
           <p:nvPr/>
         </p:nvCxnSpPr>
@@ -32872,7 +32844,7 @@
       </p:sp>
       <p:cxnSp>
         <p:nvCxnSpPr>
-          <p:cNvPr id="329" name="Google Shape;300;p12"/>
+          <p:cNvPr id="335" name="Google Shape;300;p12"/>
           <p:cNvCxnSpPr/>
           <p:nvPr/>
         </p:nvCxnSpPr>
@@ -32897,7 +32869,7 @@
       </p:cxnSp>
       <p:cxnSp>
         <p:nvCxnSpPr>
-          <p:cNvPr id="330" name="Google Shape;301;p12"/>
+          <p:cNvPr id="336" name="Google Shape;301;p12"/>
           <p:cNvCxnSpPr/>
           <p:nvPr/>
         </p:nvCxnSpPr>
